--- a/training/decks/t2-briefing.pptx
+++ b/training/decks/t2-briefing.pptx
@@ -509,7 +509,7 @@
           </a:p>
           <a:p>
             <a:r>
-              <a:t>item in the rehearsal service below, so read them from the Notes pane as each item comes up.</a:t>
+              <a:t>item in the rehearsal service below, so read them beside each item as it comes on air.</a:t>
             </a:r>
           </a:p>
           <a:p>

--- a/training/decks/t2-briefing.pptx
+++ b/training/decks/t2-briefing.pptx
@@ -684,7 +684,7 @@
           </a:p>
           <a:p>
             <a:r>
-              <a:t>Everything you choose with Shift and arrows is shown only to you until you press Enter.</a:t>
+              <a:t>Choosing with Shift and the arrows only marks an item for you. The room sees nothing new until you press Enter.</a:t>
             </a:r>
           </a:p>
         </p:txBody>

--- a/training/decks/t2-briefing.pptx
+++ b/training/decks/t2-briefing.pptx
@@ -3732,7 +3732,7 @@
                 </a:solidFill>
                 <a:latin typeface="Noto Sans"/>
               </a:rPr>
-              <a:t>Training 2</a:t>
+              <a:t>Training Session 2</a:t>
             </a:r>
           </a:p>
         </p:txBody>
